--- a/sensing_as_a_service_fixed_word_breaks.pptx
+++ b/sensing_as_a_service_fixed_word_breaks.pptx
@@ -4552,7 +4552,12 @@
           <a:lstStyle/>
           <a:p>
             <a:r>
-              <a:rPr lang="en-US" b="0" dirty="0"/>
+              <a:rPr lang="en-US" b="1" dirty="0" sz="4000">
+                <a:solidFill>
+                  <a:srgbClr val="003366"/>
+                </a:solidFill>
+                <a:latin typeface="Arial Black"/>
+              </a:rPr>
               <a:t>Sensing as a Service in 6G Perceptive Networks: A Unified Framework for ISAC Resource Allocation</a:t>
             </a:r>
             <a:endParaRPr lang="ko-KR" altLang="en-US" sz="3600" b="0" dirty="0">
@@ -4592,54 +4597,49 @@
           </a:bodyPr>
           <a:lstStyle/>
           <a:p>
-            <a:r>
-              <a:rPr lang="en-US" dirty="0" err="1"/>
-              <a:t>Fuwang</a:t>
-            </a:r>
-            <a:r>
-              <a:rPr lang="en-US" dirty="0"/>
-              <a:t> Dong , Member, IEEE, Fan Liu , Member, IEEE, </a:t>
-            </a:r>
-            <a:r>
-              <a:rPr lang="en-US" dirty="0" err="1"/>
-              <a:t>Yuanhao</a:t>
-            </a:r>
-            <a:r>
-              <a:rPr lang="en-US" dirty="0"/>
-              <a:t> Cui , Member, IEEE, Wei Wang , </a:t>
-            </a:r>
-            <a:r>
-              <a:rPr lang="en-US" i="1" dirty="0"/>
-              <a:t>Senior Member, IEEE</a:t>
-            </a:r>
-            <a:r>
-              <a:rPr lang="en-US" dirty="0"/>
-              <a:t>, Kaifeng Han , </a:t>
-            </a:r>
-            <a:r>
-              <a:rPr lang="en-US" i="1" dirty="0"/>
-              <a:t>Member, IEEE</a:t>
-            </a:r>
-            <a:r>
-              <a:rPr lang="en-US" dirty="0"/>
-              <a:t>, and </a:t>
-            </a:r>
-            <a:r>
-              <a:rPr lang="en-US" dirty="0" err="1"/>
-              <a:t>Zhiqin</a:t>
-            </a:r>
-            <a:r>
-              <a:rPr lang="en-US" dirty="0"/>
-              <a:t> Wang </a:t>
-            </a:r>
-            <a:br>
-              <a:rPr lang="en-US" dirty="0"/>
-            </a:br>
+            <a:pPr algn="ctr">
+              <a:spcAft>
+                <a:spcPts val="1000"/>
+              </a:spcAft>
+            </a:pPr>
+            <a:r>
+              <a:rPr sz="2000" b="1">
+                <a:solidFill>
+                  <a:srgbClr val="404040"/>
+                </a:solidFill>
+                <a:latin typeface="Arial"/>
+              </a:rPr>
+              <a:t>Authors: Fuwang Dong, Fan Liu, Yuanhao Cui, Wei Wang, Kaifeng Han, and Zhiqin Wang</a:t>
+            </a:r>
             <a:endParaRPr lang="en-US" altLang="ko-KR" dirty="0">
               <a:latin typeface="Arial"/>
               <a:ea typeface="맑은 고딕"/>
               <a:cs typeface="Arial"/>
             </a:endParaRPr>
+          </a:p>
+          <a:p>
+            <a:pPr algn="ctr"/>
+            <a:r>
+              <a:rPr sz="1600" i="1">
+                <a:solidFill>
+                  <a:srgbClr val="595959"/>
+                </a:solidFill>
+                <a:latin typeface="Arial"/>
+              </a:rPr>
+              <a:t>Published in: IEEE Transactions on Wireless Communications</a:t>
+            </a:r>
+          </a:p>
+          <a:p>
+            <a:pPr algn="ctr"/>
+            <a:r>
+              <a:rPr sz="1600">
+                <a:solidFill>
+                  <a:srgbClr val="595959"/>
+                </a:solidFill>
+                <a:latin typeface="Arial"/>
+              </a:rPr>
+              <a:t>Date of Publication: 10 November 2022</a:t>
+            </a:r>
           </a:p>
         </p:txBody>
       </p:sp>

--- a/sensing_as_a_service_fixed_word_breaks.pptx
+++ b/sensing_as_a_service_fixed_word_breaks.pptx
@@ -264,7 +264,7 @@
           <a:p>
             <a:fld id="{0D7A80AD-75C0-4139-8349-D7A56AAE3422}" type="datetimeFigureOut">
               <a:rPr lang="ko-KR" altLang="en-US" smtClean="0"/>
-              <a:t>2026-06-04</a:t>
+              <a:t>2026-06-07</a:t>
             </a:fld>
             <a:endParaRPr lang="ko-KR" altLang="en-US"/>
           </a:p>
@@ -684,7 +684,7 @@
           <a:p>
             <a:fld id="{3DF3EF48-9CCD-4EE9-BB40-4739D0DAE972}" type="datetime1">
               <a:rPr lang="ko-KR" altLang="en-US" smtClean="0"/>
-              <a:t>2026-06-04</a:t>
+              <a:t>2026-06-07</a:t>
             </a:fld>
             <a:endParaRPr lang="ko-KR" altLang="en-US"/>
           </a:p>
@@ -955,7 +955,7 @@
           <a:p>
             <a:fld id="{9E45620A-9A66-47B0-9218-43F171A33458}" type="datetime1">
               <a:rPr lang="ko-KR" altLang="en-US" smtClean="0"/>
-              <a:t>2026-06-04</a:t>
+              <a:t>2026-06-07</a:t>
             </a:fld>
             <a:endParaRPr lang="ko-KR" altLang="en-US"/>
           </a:p>
@@ -1231,7 +1231,7 @@
           <a:p>
             <a:fld id="{C1E586D9-B5F3-454A-8918-B4C99ED5AEDE}" type="datetime1">
               <a:rPr lang="ko-KR" altLang="en-US" smtClean="0"/>
-              <a:t>2026-06-04</a:t>
+              <a:t>2026-06-07</a:t>
             </a:fld>
             <a:endParaRPr lang="ko-KR" altLang="en-US"/>
           </a:p>
@@ -1455,7 +1455,7 @@
           <a:p>
             <a:fld id="{B0E4ADD3-F434-478C-876A-1D3933DF4707}" type="datetime1">
               <a:rPr lang="ko-KR" altLang="en-US" smtClean="0"/>
-              <a:t>2026-06-04</a:t>
+              <a:t>2026-06-07</a:t>
             </a:fld>
             <a:endParaRPr lang="ko-KR" altLang="en-US"/>
           </a:p>
@@ -1809,7 +1809,7 @@
           <a:p>
             <a:fld id="{38DF26BB-6A75-410D-A6B0-8FD34915C10D}" type="datetime1">
               <a:rPr lang="ko-KR" altLang="en-US" smtClean="0"/>
-              <a:t>2026-06-04</a:t>
+              <a:t>2026-06-07</a:t>
             </a:fld>
             <a:endParaRPr lang="ko-KR" altLang="en-US"/>
           </a:p>
@@ -2189,7 +2189,7 @@
           <a:p>
             <a:fld id="{4584CDF8-1723-475A-8393-34F016E9B184}" type="datetime1">
               <a:rPr lang="ko-KR" altLang="en-US" smtClean="0"/>
-              <a:t>2026-06-04</a:t>
+              <a:t>2026-06-07</a:t>
             </a:fld>
             <a:endParaRPr lang="ko-KR" altLang="en-US"/>
           </a:p>
@@ -2669,7 +2669,7 @@
           <a:p>
             <a:fld id="{FB8CCD4A-1F8C-4D3E-BDD6-84C4090AF0D6}" type="datetime1">
               <a:rPr lang="ko-KR" altLang="en-US" smtClean="0"/>
-              <a:t>2026-06-04</a:t>
+              <a:t>2026-06-07</a:t>
             </a:fld>
             <a:endParaRPr lang="ko-KR" altLang="en-US"/>
           </a:p>
@@ -2810,7 +2810,7 @@
           <a:p>
             <a:fld id="{CE073545-46C1-49FB-A041-5415163523D0}" type="datetime1">
               <a:rPr lang="ko-KR" altLang="en-US" smtClean="0"/>
-              <a:t>2026-06-04</a:t>
+              <a:t>2026-06-07</a:t>
             </a:fld>
             <a:endParaRPr lang="ko-KR" altLang="en-US"/>
           </a:p>
@@ -2991,7 +2991,7 @@
           <a:p>
             <a:fld id="{7EDBC6A4-6274-4803-89FF-1DA18D4FE7AA}" type="datetime1">
               <a:rPr lang="ko-KR" altLang="en-US" smtClean="0"/>
-              <a:t>2026-06-04</a:t>
+              <a:t>2026-06-07</a:t>
             </a:fld>
             <a:endParaRPr lang="ko-KR" altLang="en-US"/>
           </a:p>
@@ -3302,7 +3302,7 @@
           <a:p>
             <a:fld id="{B84A353D-6971-4305-AB04-6AEE4DD0E048}" type="datetime1">
               <a:rPr lang="ko-KR" altLang="en-US" smtClean="0"/>
-              <a:t>2026-06-04</a:t>
+              <a:t>2026-06-07</a:t>
             </a:fld>
             <a:endParaRPr lang="ko-KR" altLang="en-US"/>
           </a:p>
@@ -3590,7 +3590,7 @@
           <a:p>
             <a:fld id="{4AC75523-461B-44DB-AD97-7C06B206BE7B}" type="datetime1">
               <a:rPr lang="ko-KR" altLang="en-US" smtClean="0"/>
-              <a:t>2026-06-04</a:t>
+              <a:t>2026-06-07</a:t>
             </a:fld>
             <a:endParaRPr lang="ko-KR" altLang="en-US"/>
           </a:p>
@@ -3835,7 +3835,7 @@
           <a:p>
             <a:fld id="{9D1D2423-15C0-4D7C-B759-40ACCC100800}" type="datetime1">
               <a:rPr lang="ko-KR" altLang="en-US" smtClean="0"/>
-              <a:t>2026-06-04</a:t>
+              <a:t>2026-06-07</a:t>
             </a:fld>
             <a:endParaRPr lang="ko-KR" altLang="en-US"/>
           </a:p>
@@ -4552,7 +4552,7 @@
           <a:lstStyle/>
           <a:p>
             <a:r>
-              <a:rPr lang="en-US" b="1" dirty="0" sz="4000">
+              <a:rPr lang="en-US" sz="4000" b="1" dirty="0">
                 <a:solidFill>
                   <a:srgbClr val="003366"/>
                 </a:solidFill>
@@ -6558,7 +6558,7 @@
                 <p:ph sz="half" idx="1"/>
                 <p:extLst>
                   <p:ext uri="{D42A27DB-BD31-4B8C-83A1-F6EECF244321}">
-                    <p14:modId xmlns:p14="http://schemas.microsoft.com/office/powerpoint/2010/main" val="750368835"/>
+                    <p14:modId xmlns:p14="http://schemas.microsoft.com/office/powerpoint/2010/main" val="1292434586"/>
                   </p:ext>
                 </p:extLst>
               </p:nvPr>
@@ -6724,7 +6724,7 @@
                           </a:pPr>
                           <a:r>
                             <a:rPr lang="en-US" sz="2000" dirty="0"/>
-                            <a:t>Cramér-Rao Bound (CRB)</a:t>
+                            <a:t>Cramer-Rao Bound (CRB)</a:t>
                           </a:r>
                         </a:p>
                       </a:txBody>
@@ -6797,7 +6797,7 @@
                 <p:ph sz="half" idx="1"/>
                 <p:extLst>
                   <p:ext uri="{D42A27DB-BD31-4B8C-83A1-F6EECF244321}">
-                    <p14:modId xmlns:p14="http://schemas.microsoft.com/office/powerpoint/2010/main" val="750368835"/>
+                    <p14:modId xmlns:p14="http://schemas.microsoft.com/office/powerpoint/2010/main" val="1292434586"/>
                   </p:ext>
                 </p:extLst>
               </p:nvPr>
@@ -6934,7 +6934,7 @@
                           </a:pPr>
                           <a:r>
                             <a:rPr lang="en-US" sz="2000" dirty="0"/>
-                            <a:t>Cramér-Rao Bound (CRB)</a:t>
+                            <a:t>Cramer-Rao Bound (CRB)</a:t>
                           </a:r>
                         </a:p>
                       </a:txBody>
@@ -7156,8 +7156,8 @@
           </a:p>
         </p:txBody>
       </p:sp>
-      <mc:AlternateContent xmlns:mc="http://schemas.openxmlformats.org/markup-compatibility/2006">
-        <mc:Choice xmlns:a14="http://schemas.microsoft.com/office/drawing/2010/main" Requires="a14">
+      <mc:AlternateContent xmlns:mc="http://schemas.openxmlformats.org/markup-compatibility/2006" xmlns:a14="http://schemas.microsoft.com/office/drawing/2010/main">
+        <mc:Choice Requires="a14">
           <p:sp>
             <p:nvSpPr>
               <p:cNvPr id="7" name="Content Placeholder 6">
@@ -7222,18 +7222,24 @@
                     <m:sSub>
                       <m:sSubPr>
                         <m:ctrlPr>
-                          <a:rPr lang="en-US"/>
+                          <a:rPr lang="en-US" i="1">
+                            <a:latin typeface="Cambria Math" panose="02040503050406030204" pitchFamily="18" charset="0"/>
+                          </a:rPr>
                         </m:ctrlPr>
                       </m:sSubPr>
                       <m:e>
                         <m:r>
-                          <a:rPr lang="en-US" i="1"/>
+                          <a:rPr lang="en-US" i="1">
+                            <a:latin typeface="Cambria Math" panose="02040503050406030204" pitchFamily="18" charset="0"/>
+                          </a:rPr>
                           <m:t>𝑃</m:t>
                         </m:r>
                       </m:e>
                       <m:sub>
                         <m:r>
-                          <a:rPr lang="en-US" i="1"/>
+                          <a:rPr lang="en-US" i="1">
+                            <a:latin typeface="Cambria Math" panose="02040503050406030204" pitchFamily="18" charset="0"/>
+                          </a:rPr>
                           <m:t>𝐷</m:t>
                         </m:r>
                       </m:sub>
@@ -7249,18 +7255,24 @@
                     <m:sSub>
                       <m:sSubPr>
                         <m:ctrlPr>
-                          <a:rPr lang="en-US"/>
+                          <a:rPr lang="en-US" i="1">
+                            <a:latin typeface="Cambria Math" panose="02040503050406030204" pitchFamily="18" charset="0"/>
+                          </a:rPr>
                         </m:ctrlPr>
                       </m:sSubPr>
                       <m:e>
                         <m:r>
-                          <a:rPr lang="en-US" i="1"/>
+                          <a:rPr lang="en-US" i="1">
+                            <a:latin typeface="Cambria Math" panose="02040503050406030204" pitchFamily="18" charset="0"/>
+                          </a:rPr>
                           <m:t>𝑃</m:t>
                         </m:r>
                       </m:e>
                       <m:sub>
                         <m:r>
-                          <a:rPr lang="en-US" i="1"/>
+                          <a:rPr lang="en-US" i="1">
+                            <a:latin typeface="Cambria Math" panose="02040503050406030204" pitchFamily="18" charset="0"/>
+                          </a:rPr>
                           <m:t>𝐷</m:t>
                         </m:r>
                       </m:sub>
@@ -7322,7 +7334,7 @@
             </p:txBody>
           </p:sp>
         </mc:Choice>
-        <mc:Fallback>
+        <mc:Fallback xmlns="">
           <p:sp>
             <p:nvSpPr>
               <p:cNvPr id="7" name="Content Placeholder 6">
@@ -10313,8 +10325,8 @@
           </a:p>
         </p:txBody>
       </p:sp>
-      <mc:AlternateContent xmlns:mc="http://schemas.openxmlformats.org/markup-compatibility/2006">
-        <mc:Choice xmlns:a14="http://schemas.microsoft.com/office/drawing/2010/main" Requires="a14">
+      <mc:AlternateContent xmlns:mc="http://schemas.openxmlformats.org/markup-compatibility/2006" xmlns:a14="http://schemas.microsoft.com/office/drawing/2010/main">
+        <mc:Choice Requires="a14">
           <p:sp>
             <p:nvSpPr>
               <p:cNvPr id="3" name="Content Placeholder 2">
@@ -10447,18 +10459,24 @@
                     <m:sSub>
                       <m:sSubPr>
                         <m:ctrlPr>
-                          <a:rPr lang="en-US"/>
+                          <a:rPr lang="en-US" i="1">
+                            <a:latin typeface="Cambria Math" panose="02040503050406030204" pitchFamily="18" charset="0"/>
+                          </a:rPr>
                         </m:ctrlPr>
                       </m:sSubPr>
                       <m:e>
                         <m:r>
-                          <a:rPr lang="en-US" i="1"/>
+                          <a:rPr lang="en-US" i="1">
+                            <a:latin typeface="Cambria Math" panose="02040503050406030204" pitchFamily="18" charset="0"/>
+                          </a:rPr>
                           <m:t>𝑃</m:t>
                         </m:r>
                       </m:e>
                       <m:sub>
                         <m:r>
-                          <a:rPr lang="en-US" i="1"/>
+                          <a:rPr lang="en-US" i="1">
+                            <a:latin typeface="Cambria Math" panose="02040503050406030204" pitchFamily="18" charset="0"/>
+                          </a:rPr>
                           <m:t>𝐷</m:t>
                         </m:r>
                       </m:sub>
@@ -10482,18 +10500,24 @@
                     <m:sSub>
                       <m:sSubPr>
                         <m:ctrlPr>
-                          <a:rPr lang="en-US"/>
+                          <a:rPr lang="en-US" i="1">
+                            <a:latin typeface="Cambria Math" panose="02040503050406030204" pitchFamily="18" charset="0"/>
+                          </a:rPr>
                         </m:ctrlPr>
                       </m:sSubPr>
                       <m:e>
                         <m:r>
-                          <a:rPr lang="en-US" i="1"/>
+                          <a:rPr lang="en-US" i="1">
+                            <a:latin typeface="Cambria Math" panose="02040503050406030204" pitchFamily="18" charset="0"/>
+                          </a:rPr>
                           <m:t>𝑃</m:t>
                         </m:r>
                       </m:e>
                       <m:sub>
                         <m:r>
-                          <a:rPr lang="en-US" i="1"/>
+                          <a:rPr lang="en-US" i="1">
+                            <a:latin typeface="Cambria Math" panose="02040503050406030204" pitchFamily="18" charset="0"/>
+                          </a:rPr>
                           <m:t>𝐹𝐴</m:t>
                         </m:r>
                       </m:sub>
@@ -10520,18 +10544,24 @@
                     <m:sSub>
                       <m:sSubPr>
                         <m:ctrlPr>
-                          <a:rPr lang="en-US"/>
+                          <a:rPr lang="en-US" i="1">
+                            <a:latin typeface="Cambria Math" panose="02040503050406030204" pitchFamily="18" charset="0"/>
+                          </a:rPr>
                         </m:ctrlPr>
                       </m:sSubPr>
                       <m:e>
                         <m:r>
-                          <a:rPr lang="en-US" i="1"/>
+                          <a:rPr lang="en-US" i="1">
+                            <a:latin typeface="Cambria Math" panose="02040503050406030204" pitchFamily="18" charset="0"/>
+                          </a:rPr>
                           <m:t>𝑃</m:t>
                         </m:r>
                       </m:e>
                       <m:sub>
                         <m:r>
-                          <a:rPr lang="en-US" i="1"/>
+                          <a:rPr lang="en-US" i="1">
+                            <a:latin typeface="Cambria Math" panose="02040503050406030204" pitchFamily="18" charset="0"/>
+                          </a:rPr>
                           <m:t>𝐹𝐴</m:t>
                         </m:r>
                       </m:sub>
@@ -10554,18 +10584,24 @@
                     <m:sSub>
                       <m:sSubPr>
                         <m:ctrlPr>
-                          <a:rPr lang="en-US"/>
+                          <a:rPr lang="en-US" i="1">
+                            <a:latin typeface="Cambria Math" panose="02040503050406030204" pitchFamily="18" charset="0"/>
+                          </a:rPr>
                         </m:ctrlPr>
                       </m:sSubPr>
                       <m:e>
                         <m:r>
-                          <a:rPr lang="en-US" i="1"/>
+                          <a:rPr lang="en-US" i="1">
+                            <a:latin typeface="Cambria Math" panose="02040503050406030204" pitchFamily="18" charset="0"/>
+                          </a:rPr>
                           <m:t>𝑃</m:t>
                         </m:r>
                       </m:e>
                       <m:sub>
                         <m:r>
-                          <a:rPr lang="en-US" i="1"/>
+                          <a:rPr lang="en-US" i="1">
+                            <a:latin typeface="Cambria Math" panose="02040503050406030204" pitchFamily="18" charset="0"/>
+                          </a:rPr>
                           <m:t>𝐷</m:t>
                         </m:r>
                       </m:sub>
@@ -10598,7 +10634,7 @@
             </p:txBody>
           </p:sp>
         </mc:Choice>
-        <mc:Fallback>
+        <mc:Fallback xmlns="">
           <p:sp>
             <p:nvSpPr>
               <p:cNvPr id="3" name="Content Placeholder 2">
